--- a/ゲーム科3年/00_前期/ゲームエンジンⅤ/15_UI.pptx
+++ b/ゲーム科3年/00_前期/ゲームエンジンⅤ/15_UI.pptx
@@ -289,7 +289,7 @@
           <a:p>
             <a:fld id="{E9CC885B-4903-4D54-9A93-00025F12DED9}" type="datetimeFigureOut">
               <a:rPr kumimoji="1" lang="ja-JP" altLang="en-US" smtClean="0"/>
-              <a:t>2025/2/19</a:t>
+              <a:t>2026/3/26</a:t>
             </a:fld>
             <a:endParaRPr kumimoji="1" lang="ja-JP" altLang="en-US"/>
           </a:p>
@@ -519,7 +519,7 @@
           <a:p>
             <a:fld id="{E9CC885B-4903-4D54-9A93-00025F12DED9}" type="datetimeFigureOut">
               <a:rPr kumimoji="1" lang="ja-JP" altLang="en-US" smtClean="0"/>
-              <a:t>2025/2/19</a:t>
+              <a:t>2026/3/26</a:t>
             </a:fld>
             <a:endParaRPr kumimoji="1" lang="ja-JP" altLang="en-US"/>
           </a:p>
@@ -759,7 +759,7 @@
           <a:p>
             <a:fld id="{E9CC885B-4903-4D54-9A93-00025F12DED9}" type="datetimeFigureOut">
               <a:rPr kumimoji="1" lang="ja-JP" altLang="en-US" smtClean="0"/>
-              <a:t>2025/2/19</a:t>
+              <a:t>2026/3/26</a:t>
             </a:fld>
             <a:endParaRPr kumimoji="1" lang="ja-JP" altLang="en-US"/>
           </a:p>
@@ -989,7 +989,7 @@
           <a:p>
             <a:fld id="{E9CC885B-4903-4D54-9A93-00025F12DED9}" type="datetimeFigureOut">
               <a:rPr kumimoji="1" lang="ja-JP" altLang="en-US" smtClean="0"/>
-              <a:t>2025/2/19</a:t>
+              <a:t>2026/3/26</a:t>
             </a:fld>
             <a:endParaRPr kumimoji="1" lang="ja-JP" altLang="en-US"/>
           </a:p>
@@ -1264,7 +1264,7 @@
           <a:p>
             <a:fld id="{E9CC885B-4903-4D54-9A93-00025F12DED9}" type="datetimeFigureOut">
               <a:rPr kumimoji="1" lang="ja-JP" altLang="en-US" smtClean="0"/>
-              <a:t>2025/2/19</a:t>
+              <a:t>2026/3/26</a:t>
             </a:fld>
             <a:endParaRPr kumimoji="1" lang="ja-JP" altLang="en-US"/>
           </a:p>
@@ -1593,7 +1593,7 @@
           <a:p>
             <a:fld id="{E9CC885B-4903-4D54-9A93-00025F12DED9}" type="datetimeFigureOut">
               <a:rPr kumimoji="1" lang="ja-JP" altLang="en-US" smtClean="0"/>
-              <a:t>2025/2/19</a:t>
+              <a:t>2026/3/26</a:t>
             </a:fld>
             <a:endParaRPr kumimoji="1" lang="ja-JP" altLang="en-US"/>
           </a:p>
@@ -2069,7 +2069,7 @@
           <a:p>
             <a:fld id="{E9CC885B-4903-4D54-9A93-00025F12DED9}" type="datetimeFigureOut">
               <a:rPr kumimoji="1" lang="ja-JP" altLang="en-US" smtClean="0"/>
-              <a:t>2025/2/19</a:t>
+              <a:t>2026/3/26</a:t>
             </a:fld>
             <a:endParaRPr kumimoji="1" lang="ja-JP" altLang="en-US"/>
           </a:p>
@@ -2210,7 +2210,7 @@
           <a:p>
             <a:fld id="{E9CC885B-4903-4D54-9A93-00025F12DED9}" type="datetimeFigureOut">
               <a:rPr kumimoji="1" lang="ja-JP" altLang="en-US" smtClean="0"/>
-              <a:t>2025/2/19</a:t>
+              <a:t>2026/3/26</a:t>
             </a:fld>
             <a:endParaRPr kumimoji="1" lang="ja-JP" altLang="en-US"/>
           </a:p>
@@ -2323,7 +2323,7 @@
           <a:p>
             <a:fld id="{E9CC885B-4903-4D54-9A93-00025F12DED9}" type="datetimeFigureOut">
               <a:rPr kumimoji="1" lang="ja-JP" altLang="en-US" smtClean="0"/>
-              <a:t>2025/2/19</a:t>
+              <a:t>2026/3/26</a:t>
             </a:fld>
             <a:endParaRPr kumimoji="1" lang="ja-JP" altLang="en-US"/>
           </a:p>
@@ -2666,7 +2666,7 @@
           <a:p>
             <a:fld id="{E9CC885B-4903-4D54-9A93-00025F12DED9}" type="datetimeFigureOut">
               <a:rPr kumimoji="1" lang="ja-JP" altLang="en-US" smtClean="0"/>
-              <a:t>2025/2/19</a:t>
+              <a:t>2026/3/26</a:t>
             </a:fld>
             <a:endParaRPr kumimoji="1" lang="ja-JP" altLang="en-US"/>
           </a:p>
@@ -2954,7 +2954,7 @@
           <a:p>
             <a:fld id="{E9CC885B-4903-4D54-9A93-00025F12DED9}" type="datetimeFigureOut">
               <a:rPr kumimoji="1" lang="ja-JP" altLang="en-US" smtClean="0"/>
-              <a:t>2025/2/19</a:t>
+              <a:t>2026/3/26</a:t>
             </a:fld>
             <a:endParaRPr kumimoji="1" lang="ja-JP" altLang="en-US"/>
           </a:p>
@@ -3227,7 +3227,7 @@
           <a:p>
             <a:fld id="{E9CC885B-4903-4D54-9A93-00025F12DED9}" type="datetimeFigureOut">
               <a:rPr kumimoji="1" lang="ja-JP" altLang="en-US" smtClean="0"/>
-              <a:t>2025/2/19</a:t>
+              <a:t>2026/3/26</a:t>
             </a:fld>
             <a:endParaRPr kumimoji="1" lang="ja-JP" altLang="en-US"/>
           </a:p>
@@ -8531,7 +8531,7 @@
         <p:spPr>
           <a:xfrm>
             <a:off x="567542" y="1216429"/>
-            <a:ext cx="8475397" cy="461665"/>
+            <a:ext cx="6320961" cy="461665"/>
           </a:xfrm>
           <a:prstGeom prst="rect">
             <a:avLst/>
@@ -8545,8 +8545,12 @@
           <a:lstStyle/>
           <a:p>
             <a:r>
+              <a:rPr lang="ja-JP" altLang="en-US" sz="2400" dirty="0"/>
+              <a:t>親クラスは</a:t>
+            </a:r>
+            <a:r>
               <a:rPr kumimoji="1" lang="ja-JP" altLang="en-US" sz="2400" dirty="0"/>
-              <a:t>親クラスはほとんどの場合「</a:t>
+              <a:t>「</a:t>
             </a:r>
             <a:r>
               <a:rPr kumimoji="1" lang="en-US" altLang="ja-JP" sz="2400" b="1" dirty="0">
@@ -8558,7 +8562,7 @@
             </a:r>
             <a:r>
               <a:rPr kumimoji="1" lang="ja-JP" altLang="en-US" sz="2400" dirty="0"/>
-              <a:t>」で大丈夫です。</a:t>
+              <a:t>」を選択します。</a:t>
             </a:r>
             <a:endParaRPr kumimoji="1" lang="en-US" altLang="ja-JP" sz="2400" dirty="0"/>
           </a:p>
